--- a/projeto_centelha/PITCH_DECK.pptx
+++ b/projeto_centelha/PITCH_DECK.pptx
@@ -18,8 +18,6 @@
     <p:sldId id="266" r:id="rId12"/>
     <p:sldId id="267" r:id="rId13"/>
     <p:sldId id="268" r:id="rId14"/>
-    <p:sldId id="269" r:id="rId15"/>
-    <p:sldId id="270" r:id="rId16"/>
   </p:sldIdLst>
   <p:sldSz cx="12192000" cy="6858000"/>
   <p:notesSz cx="12192000" cy="6858000"/>
@@ -2968,7 +2966,7 @@
             <a:br/>
             <a:r>
               <a:rPr/>
-              <a:t>Diego</a:t>
+              <a:t>Equipe Avalia+</a:t>
             </a:r>
           </a:p>
         </p:txBody>
@@ -2993,7 +2991,7 @@
             </a:pPr>
             <a:r>
               <a:rPr/>
-              <a:t>2026-01-05</a:t>
+              <a:t>2026-01-01</a:t>
             </a:r>
           </a:p>
         </p:txBody>
@@ -3040,7 +3038,7 @@
             </a:pPr>
             <a:r>
               <a:rPr/>
-              <a:t>Mercado e clientes</a:t>
+              <a:t>Modelo de Negócio</a:t>
             </a:r>
           </a:p>
         </p:txBody>
@@ -3060,24 +3058,45 @@
           <a:bodyPr/>
           <a:lstStyle/>
           <a:p>
+            <a:pPr lvl="0" indent="0" marL="0">
+              <a:buNone/>
+            </a:pPr>
+            <a:r>
+              <a:rPr/>
+              <a:t>SaaS B2B flexível para a realidade dos editais.</a:t>
+            </a:r>
+          </a:p>
+          <a:p>
             <a:pPr lvl="0"/>
             <a:r>
-              <a:rPr/>
-              <a:t>Universidades, IFs, fundações, incubadoras e programas de inovação</a:t>
+              <a:rPr b="1"/>
+              <a:t>Licença por Edital:</a:t>
+            </a:r>
+            <a:r>
+              <a:rPr/>
+              <a:t> Para demandas pontuais (Ticket médio: R$ Xk).</a:t>
             </a:r>
           </a:p>
           <a:p>
             <a:pPr lvl="0"/>
             <a:r>
-              <a:rPr/>
-              <a:t>Órgãos públicos com chamadas/seleções e necessidade de prestação de contas</a:t>
+              <a:rPr b="1"/>
+              <a:t>Assinatura Anual:</a:t>
+            </a:r>
+            <a:r>
+              <a:rPr/>
+              <a:t> Para instituições com fluxo recorrente (Ticket médio: R$ Yk/ano).</a:t>
             </a:r>
           </a:p>
           <a:p>
             <a:pPr lvl="0"/>
             <a:r>
-              <a:rPr/>
-              <a:t>Dor recorrente: equipe enxuta + exigência de rastreabilidade e conformidade</a:t>
+              <a:rPr b="1"/>
+              <a:t>Setup + Suporte:</a:t>
+            </a:r>
+            <a:r>
+              <a:rPr/>
+              <a:t> Consultoria na configuração do certame.</a:t>
             </a:r>
           </a:p>
         </p:txBody>
@@ -3114,7 +3133,12 @@
             <p:ph type="title"/>
           </p:nvPr>
         </p:nvSpPr>
-        <p:spPr/>
+        <p:spPr>
+          <a:xfrm>
+            <a:off x="457201" y="204787"/>
+            <a:ext cx="3008313" cy="871538"/>
+          </a:xfrm>
+        </p:spPr>
         <p:txBody>
           <a:bodyPr/>
           <a:lstStyle/>
@@ -3124,64 +3148,114 @@
             </a:pPr>
             <a:r>
               <a:rPr/>
-              <a:t>Modelo de negócio</a:t>
-            </a:r>
-          </a:p>
-        </p:txBody>
-      </p:sp>
-      <p:sp>
-        <p:nvSpPr>
-          <p:cNvPr id="3" name="Content Placeholder 2"/>
-          <p:cNvSpPr>
-            <a:spLocks noGrp="1"/>
-          </p:cNvSpPr>
-          <p:nvPr>
-            <p:ph idx="1"/>
-          </p:nvPr>
-        </p:nvSpPr>
-        <p:spPr/>
-        <p:txBody>
-          <a:bodyPr/>
-          <a:lstStyle/>
+              <a:t>Estágio Atual e Tração</a:t>
+            </a:r>
+          </a:p>
+        </p:txBody>
+      </p:sp>
+      <p:sp>
+        <p:nvSpPr>
+          <p:cNvPr id="4" name="Text Placeholder 3"/>
+          <p:cNvSpPr>
+            <a:spLocks noGrp="1"/>
+          </p:cNvSpPr>
+          <p:nvPr>
+            <p:ph idx="2" sz="half" type="body"/>
+          </p:nvPr>
+        </p:nvSpPr>
+        <p:spPr/>
+        <p:txBody>
+          <a:bodyPr/>
+          <a:lstStyle/>
+          <a:p>
+            <a:pPr lvl="0" indent="0" marL="0">
+              <a:buNone/>
+            </a:pPr>
+            <a:r>
+              <a:rPr b="1"/>
+              <a:t>MVP Funcional e Validado.</a:t>
+            </a:r>
+          </a:p>
           <a:p>
             <a:pPr lvl="0"/>
             <a:r>
               <a:rPr/>
-              <a:t>Assinatura SaaS </a:t>
-            </a:r>
-            <a:r>
-              <a:rPr b="1"/>
-              <a:t>por edital (ciclo)</a:t>
-            </a:r>
-            <a:r>
-              <a:rPr/>
-              <a:t> ou </a:t>
-            </a:r>
-            <a:r>
-              <a:rPr b="1"/>
-              <a:t>anual</a:t>
-            </a:r>
-            <a:r>
-              <a:rPr/>
-              <a:t> (múltiplas seleções)</a:t>
+              <a:t>Módulos de </a:t>
+            </a:r>
+            <a:r>
+              <a:rPr>
+                <a:hlinkClick r:id="rId2"/>
+              </a:rPr>
+              <a:t>Inscrição</a:t>
+            </a:r>
+            <a:r>
+              <a:rPr/>
+              <a:t> e </a:t>
+            </a:r>
+            <a:r>
+              <a:rPr>
+                <a:hlinkClick r:id="rId3"/>
+              </a:rPr>
+              <a:t>Avaliação</a:t>
+            </a:r>
+            <a:r>
+              <a:rPr/>
+              <a:t> operacionais.</a:t>
             </a:r>
           </a:p>
           <a:p>
             <a:pPr lvl="0"/>
             <a:r>
               <a:rPr/>
-              <a:t>Varia por volume de inscrições e nº de avaliadores</a:t>
+              <a:t>Sistema de Recursos e Resultados implementado.</a:t>
             </a:r>
           </a:p>
           <a:p>
             <a:pPr lvl="0"/>
             <a:r>
               <a:rPr/>
-              <a:t>Implantação: configuração + orientação + suporte durante o ciclo</a:t>
-            </a:r>
-          </a:p>
-        </p:txBody>
-      </p:sp>
+              <a:t>Arquitetura escalável (Node.js + JSON/PostgreSQL).</a:t>
+            </a:r>
+          </a:p>
+          <a:p>
+            <a:pPr lvl="0"/>
+            <a:r>
+              <a:rPr/>
+              <a:t>Próximo passo: Validação comercial com pilotos pagos.</a:t>
+            </a:r>
+          </a:p>
+        </p:txBody>
+      </p:sp>
+      <p:pic>
+        <p:nvPicPr>
+          <p:cNvPr descr="prints/manual/fig-24-admin-dashboard-tabela-protocolo.png" id="0" name="Picture 1"/>
+          <p:cNvPicPr>
+            <a:picLocks noGrp="1" noChangeAspect="1"/>
+          </p:cNvPicPr>
+          <p:nvPr/>
+        </p:nvPicPr>
+        <p:blipFill>
+          <a:blip r:embed="rId4"/>
+          <a:stretch>
+            <a:fillRect/>
+          </a:stretch>
+        </p:blipFill>
+        <p:spPr bwMode="auto">
+          <a:xfrm>
+            <a:off x="3568700" y="1219200"/>
+            <a:ext cx="5105400" cy="2336800"/>
+          </a:xfrm>
+          <a:prstGeom prst="rect">
+            <a:avLst/>
+          </a:prstGeom>
+          <a:noFill/>
+          <a:ln w="9525">
+            <a:noFill/>
+            <a:headEnd/>
+            <a:tailEnd/>
+          </a:ln>
+        </p:spPr>
+      </p:pic>
     </p:spTree>
   </p:cSld>
 </p:sld>
@@ -3224,7 +3298,7 @@
             </a:pPr>
             <a:r>
               <a:rPr/>
-              <a:t>Roadmap com recursos do Centelha</a:t>
+              <a:t>Roadmap e Uso do Recurso (Centelha)</a:t>
             </a:r>
           </a:p>
         </p:txBody>
@@ -3244,31 +3318,63 @@
           <a:bodyPr/>
           <a:lstStyle/>
           <a:p>
+            <a:pPr lvl="0" indent="0" marL="0">
+              <a:buNone/>
+            </a:pPr>
+            <a:r>
+              <a:rPr b="1"/>
+              <a:t>Objetivo:</a:t>
+            </a:r>
+            <a:r>
+              <a:rPr/>
+              <a:t> Transformar o MVP em Produto de Mercado.</a:t>
+            </a:r>
+          </a:p>
+          <a:p>
             <a:pPr lvl="0"/>
             <a:r>
-              <a:rPr/>
-              <a:t>Configuração completa por edital (critérios, pesos, escalas, rubricas por fase)</a:t>
+              <a:rPr b="1"/>
+              <a:t>Meta (6 meses):</a:t>
+            </a:r>
+            <a:r>
+              <a:rPr/>
+              <a:t> Finalizar módulo de relatórios gerenciais e executar </a:t>
+            </a:r>
+            <a:r>
+              <a:rPr b="1"/>
+              <a:t>3 pilotos pagos</a:t>
+            </a:r>
+            <a:r>
+              <a:rPr/>
+              <a:t>.</a:t>
             </a:r>
           </a:p>
           <a:p>
             <a:pPr lvl="0"/>
             <a:r>
-              <a:rPr/>
-              <a:t>Multicliente e isolamento por organização (replicável)</a:t>
-            </a:r>
-          </a:p>
-          <a:p>
-            <a:pPr lvl="0"/>
-            <a:r>
-              <a:rPr/>
-              <a:t>Consolidação em PostgreSQL quando aplicável + segurança em repouso</a:t>
-            </a:r>
-          </a:p>
-          <a:p>
-            <a:pPr lvl="0"/>
-            <a:r>
-              <a:rPr/>
-              <a:t>Relatórios e reforço da trilha auditável (padrão de eventos)</a:t>
+              <a:rPr b="1"/>
+              <a:t>Investimento (R$ 60k):</a:t>
+            </a:r>
+          </a:p>
+          <a:p>
+            <a:pPr lvl="1"/>
+            <a:r>
+              <a:rPr/>
+              <a:t>50% Desenvolvimento (Finalização de features).</a:t>
+            </a:r>
+          </a:p>
+          <a:p>
+            <a:pPr lvl="1"/>
+            <a:r>
+              <a:rPr/>
+              <a:t>30% Marketing e Vendas (Aquisição de pilotos).</a:t>
+            </a:r>
+          </a:p>
+          <a:p>
+            <a:pPr lvl="1"/>
+            <a:r>
+              <a:rPr/>
+              <a:t>20% Infraestrutura e Jurídico.</a:t>
             </a:r>
           </a:p>
         </p:txBody>
@@ -3315,7 +3421,7 @@
             </a:pPr>
             <a:r>
               <a:rPr/>
-              <a:t>Time e governança</a:t>
+              <a:t>A Equipe</a:t>
             </a:r>
           </a:p>
         </p:txBody>
@@ -3334,6 +3440,15 @@
         <p:txBody>
           <a:bodyPr/>
           <a:lstStyle/>
+          <a:p>
+            <a:pPr lvl="0" indent="0" marL="0">
+              <a:buNone/>
+            </a:pPr>
+            <a:r>
+              <a:rPr/>
+              <a:t>Quem faz acontecer.</a:t>
+            </a:r>
+          </a:p>
           <a:p>
             <a:pPr lvl="0"/>
             <a:r>
@@ -3342,207 +3457,40 @@
             </a:r>
             <a:r>
               <a:rPr/>
-              <a:t>: produto, validação com usuários, implantação e pilotos</a:t>
+              <a:t>: Produto, validação com usuários, implantação e pilotos.</a:t>
             </a:r>
           </a:p>
           <a:p>
             <a:pPr lvl="0"/>
             <a:r>
               <a:rPr b="1"/>
-              <a:t>Catuxe Varjão de Santana Oliveira</a:t>
-            </a:r>
-            <a:r>
-              <a:rPr/>
-              <a:t>: engenharia, qualidade (MPS.BR) e controles (HMAC)</a:t>
+              <a:t>Catuxe Varjão</a:t>
+            </a:r>
+            <a:r>
+              <a:rPr/>
+              <a:t>: Engenharia, qualidade (MPS.BR) e controles (HMAC).</a:t>
             </a:r>
           </a:p>
           <a:p>
             <a:pPr lvl="0"/>
             <a:r>
               <a:rPr b="1"/>
-              <a:t>Dulce Paloma Vidal</a:t>
-            </a:r>
-            <a:r>
-              <a:rPr/>
-              <a:t>: jurídico/compliance, LGPD e aderência legal do processo</a:t>
-            </a:r>
-          </a:p>
-        </p:txBody>
-      </p:sp>
-    </p:spTree>
-  </p:cSld>
-</p:sld>
-</file>
-
-<file path=ppt/slides/slide14.xml><?xml version="1.0" encoding="utf-8"?>
-<p:sld xmlns:a="http://schemas.openxmlformats.org/drawingml/2006/main" xmlns:r="http://schemas.openxmlformats.org/officeDocument/2006/relationships" xmlns:p="http://schemas.openxmlformats.org/presentationml/2006/main">
-  <p:cSld>
-    <p:spTree>
-      <p:nvGrpSpPr>
-        <p:cNvPr id="1" name=""/>
-        <p:cNvGrpSpPr/>
-        <p:nvPr/>
-      </p:nvGrpSpPr>
-      <p:grpSpPr>
-        <a:xfrm>
-          <a:off x="0" y="0"/>
-          <a:ext cx="0" cy="0"/>
-          <a:chOff x="0" y="0"/>
-          <a:chExt cx="0" cy="0"/>
-        </a:xfrm>
-      </p:grpSpPr>
-      <p:sp>
-        <p:nvSpPr>
-          <p:cNvPr id="2" name="Title 1"/>
-          <p:cNvSpPr>
-            <a:spLocks noGrp="1"/>
-          </p:cNvSpPr>
-          <p:nvPr>
-            <p:ph type="title"/>
-          </p:nvPr>
-        </p:nvSpPr>
-        <p:spPr/>
-        <p:txBody>
-          <a:bodyPr/>
-          <a:lstStyle/>
-          <a:p>
-            <a:pPr lvl="0" indent="0" marL="0">
-              <a:buNone/>
-            </a:pPr>
-            <a:r>
-              <a:rPr/>
-              <a:t>Impacto esperado</a:t>
-            </a:r>
-          </a:p>
-        </p:txBody>
-      </p:sp>
-      <p:sp>
-        <p:nvSpPr>
-          <p:cNvPr id="3" name="Content Placeholder 2"/>
-          <p:cNvSpPr>
-            <a:spLocks noGrp="1"/>
-          </p:cNvSpPr>
-          <p:nvPr>
-            <p:ph idx="1"/>
-          </p:nvPr>
-        </p:nvSpPr>
-        <p:spPr/>
-        <p:txBody>
-          <a:bodyPr/>
-          <a:lstStyle/>
+              <a:t>Dulce Paloma</a:t>
+            </a:r>
+            <a:r>
+              <a:rPr/>
+              <a:t>: Jurídico/Compliance, LGPD e aderência legal.</a:t>
+            </a:r>
+          </a:p>
           <a:p>
             <a:pPr lvl="0"/>
             <a:r>
-              <a:rPr/>
-              <a:t>Menos retrabalho e erros de consolidação</a:t>
-            </a:r>
-          </a:p>
-          <a:p>
-            <a:pPr lvl="0"/>
-            <a:r>
-              <a:rPr/>
-              <a:t>Menos reenvios, papel e deslocamentos</a:t>
-            </a:r>
-          </a:p>
-          <a:p>
-            <a:pPr lvl="0"/>
-            <a:r>
-              <a:rPr/>
-              <a:t>Menor exposição de dados pessoais (HMAC + blind review)</a:t>
-            </a:r>
-          </a:p>
-        </p:txBody>
-      </p:sp>
-    </p:spTree>
-  </p:cSld>
-</p:sld>
-</file>
-
-<file path=ppt/slides/slide15.xml><?xml version="1.0" encoding="utf-8"?>
-<p:sld xmlns:a="http://schemas.openxmlformats.org/drawingml/2006/main" xmlns:r="http://schemas.openxmlformats.org/officeDocument/2006/relationships" xmlns:p="http://schemas.openxmlformats.org/presentationml/2006/main">
-  <p:cSld>
-    <p:spTree>
-      <p:nvGrpSpPr>
-        <p:cNvPr id="1" name=""/>
-        <p:cNvGrpSpPr/>
-        <p:nvPr/>
-      </p:nvGrpSpPr>
-      <p:grpSpPr>
-        <a:xfrm>
-          <a:off x="0" y="0"/>
-          <a:ext cx="0" cy="0"/>
-          <a:chOff x="0" y="0"/>
-          <a:chExt cx="0" cy="0"/>
-        </a:xfrm>
-      </p:grpSpPr>
-      <p:sp>
-        <p:nvSpPr>
-          <p:cNvPr id="2" name="Title 1"/>
-          <p:cNvSpPr>
-            <a:spLocks noGrp="1"/>
-          </p:cNvSpPr>
-          <p:nvPr>
-            <p:ph type="title"/>
-          </p:nvPr>
-        </p:nvSpPr>
-        <p:spPr/>
-        <p:txBody>
-          <a:bodyPr/>
-          <a:lstStyle/>
-          <a:p>
-            <a:pPr lvl="0" indent="0" marL="0">
-              <a:buNone/>
-            </a:pPr>
-            <a:r>
-              <a:rPr/>
-              <a:t>Encerramento</a:t>
-            </a:r>
-          </a:p>
-        </p:txBody>
-      </p:sp>
-      <p:sp>
-        <p:nvSpPr>
-          <p:cNvPr id="3" name="Content Placeholder 2"/>
-          <p:cNvSpPr>
-            <a:spLocks noGrp="1"/>
-          </p:cNvSpPr>
-          <p:nvPr>
-            <p:ph idx="1"/>
-          </p:nvPr>
-        </p:nvSpPr>
-        <p:spPr/>
-        <p:txBody>
-          <a:bodyPr/>
-          <a:lstStyle/>
-          <a:p>
-            <a:pPr lvl="0" indent="0" marL="0">
-              <a:buNone/>
-            </a:pPr>
-            <a:r>
-              <a:rPr/>
-              <a:t>No Centelha: transformar o núcleo funcional em produto </a:t>
-            </a:r>
-            <a:r>
               <a:rPr b="1"/>
-              <a:t>replicável e escalável</a:t>
-            </a:r>
-            <a:r>
-              <a:rPr/>
-              <a:t>.</a:t>
-            </a:r>
-          </a:p>
-          <a:p>
-            <a:pPr lvl="0"/>
-            <a:r>
-              <a:rPr/>
-              <a:t>Configuração por edital, relatórios e melhor UX</a:t>
-            </a:r>
-          </a:p>
-          <a:p>
-            <a:pPr lvl="0"/>
-            <a:r>
-              <a:rPr/>
-              <a:t>Controles e evidências auditáveis com foco em integridade e conformidade</a:t>
+              <a:t>Everaldo Fontes</a:t>
+            </a:r>
+            <a:r>
+              <a:rPr/>
+              <a:t>: Programação e validação com usuários.</a:t>
             </a:r>
           </a:p>
         </p:txBody>
@@ -3569,9 +3517,34 @@
           <a:chExt cx="0" cy="0"/>
         </a:xfrm>
       </p:grpSpPr>
+      <p:sp>
+        <p:nvSpPr>
+          <p:cNvPr id="2" name="Title 1"/>
+          <p:cNvSpPr>
+            <a:spLocks noGrp="1"/>
+          </p:cNvSpPr>
+          <p:nvPr>
+            <p:ph type="title"/>
+          </p:nvPr>
+        </p:nvSpPr>
+        <p:spPr/>
+        <p:txBody>
+          <a:bodyPr/>
+          <a:lstStyle/>
+          <a:p>
+            <a:pPr lvl="0" indent="0" marL="0">
+              <a:buNone/>
+            </a:pPr>
+            <a:r>
+              <a:rPr/>
+              <a:t>A Solução Definitiva para Governança em Seleções</a:t>
+            </a:r>
+          </a:p>
+        </p:txBody>
+      </p:sp>
       <p:pic>
         <p:nvPicPr>
-          <p:cNvPr descr="../img/logo_avalia_horizontal.png" id="0" name="Picture 1"/>
+          <p:cNvPr descr="img/logo_avalia_horizontal.png" id="0" name="Picture 1"/>
           <p:cNvPicPr>
             <a:picLocks noGrp="1" noChangeAspect="1"/>
           </p:cNvPicPr>
@@ -3640,11 +3613,22 @@
               <a:buNone/>
             </a:pPr>
             <a:r>
+              <a:rPr b="1"/>
+              <a:t>Transformamos processos seletivos vulneráveis em fluxos auditáveis, seguros e 100% digitais.</a:t>
+            </a:r>
+          </a:p>
+          <a:p>
+            <a:pPr lvl="0" indent="0" marL="0">
+              <a:buNone/>
+            </a:pPr>
+            <a:r>
               <a:rPr/>
               <a:t>Plataforma SaaS para </a:t>
             </a:r>
             <a:r>
-              <a:rPr b="1"/>
+              <a:rPr b="1">
+                <a:hlinkClick r:id="rId2"/>
+              </a:rPr>
               <a:t>inscrição</a:t>
             </a:r>
             <a:r>
@@ -3652,57 +3636,24 @@
               <a:t>, </a:t>
             </a:r>
             <a:r>
-              <a:rPr b="1"/>
-              <a:t>avaliação por banca</a:t>
+              <a:rPr b="1">
+                <a:hlinkClick r:id="rId3"/>
+              </a:rPr>
+              <a:t>avaliação</a:t>
             </a:r>
             <a:r>
               <a:rPr/>
               <a:t> e </a:t>
             </a:r>
             <a:r>
-              <a:rPr b="1"/>
-              <a:t>consolidação de resultados</a:t>
-            </a:r>
-            <a:r>
-              <a:rPr/>
-              <a:t>.</a:t>
-            </a:r>
-          </a:p>
-          <a:p>
-            <a:pPr lvl="0"/>
-            <a:r>
-              <a:rPr/>
-              <a:t>Resultados com </a:t>
-            </a:r>
-            <a:r>
-              <a:rPr b="1"/>
-              <a:t>evidências verificáveis</a:t>
-            </a:r>
-            <a:r>
-              <a:rPr/>
-              <a:t> (protocolo + hash)</a:t>
-            </a:r>
-          </a:p>
-          <a:p>
-            <a:pPr lvl="0"/>
-            <a:r>
-              <a:rPr b="1"/>
-              <a:t>Menos retrabalho</a:t>
-            </a:r>
-            <a:r>
-              <a:rPr/>
-              <a:t> e risco operacional</a:t>
-            </a:r>
-          </a:p>
-          <a:p>
-            <a:pPr lvl="0"/>
-            <a:r>
-              <a:rPr b="1"/>
-              <a:t>Privacidade/LGPD</a:t>
-            </a:r>
-            <a:r>
-              <a:rPr/>
-              <a:t> como requisito do processo</a:t>
+              <a:rPr b="1">
+                <a:hlinkClick r:id="rId4"/>
+              </a:rPr>
+              <a:t>consolidação</a:t>
+            </a:r>
+            <a:r>
+              <a:rPr/>
+              <a:t> com integridade jurídica.</a:t>
             </a:r>
           </a:p>
         </p:txBody>
@@ -3749,7 +3700,7 @@
             </a:pPr>
             <a:r>
               <a:rPr/>
-              <a:t>Problema</a:t>
+              <a:t>O Problema: O Caos da Gestão Manual</a:t>
             </a:r>
           </a:p>
         </p:txBody>
@@ -3769,31 +3720,53 @@
           <a:bodyPr/>
           <a:lstStyle/>
           <a:p>
+            <a:pPr lvl="0" indent="0" marL="0">
+              <a:buNone/>
+            </a:pPr>
+            <a:r>
+              <a:rPr/>
+              <a:t>Processos seletivos geridos por e-mail e planilhas são uma </a:t>
+            </a:r>
+            <a:r>
+              <a:rPr b="1"/>
+              <a:t>bomba-relógio jurídica e operacional</a:t>
+            </a:r>
+            <a:r>
+              <a:rPr/>
+              <a:t>.</a:t>
+            </a:r>
+          </a:p>
+          <a:p>
             <a:pPr lvl="0"/>
             <a:r>
-              <a:rPr/>
-              <a:t>Processo disperso (planilhas, e-mail, versões)</a:t>
+              <a:rPr b="1"/>
+              <a:t>Risco Jurídico Imediato:</a:t>
+            </a:r>
+            <a:r>
+              <a:rPr/>
+              <a:t> Falta de rastreabilidade abre margem para recursos e anulação de editais.</a:t>
             </a:r>
           </a:p>
           <a:p>
             <a:pPr lvl="0"/>
             <a:r>
-              <a:rPr/>
-              <a:t>Erros de consolidação e disputa por “qual arquivo vale”</a:t>
+              <a:rPr b="1"/>
+              <a:t>Ineficiência Operacional:</a:t>
+            </a:r>
+            <a:r>
+              <a:rPr/>
+              <a:t> Horas perdidas consolidando versões conflitantes de planilhas.</a:t>
             </a:r>
           </a:p>
           <a:p>
             <a:pPr lvl="0"/>
             <a:r>
-              <a:rPr/>
-              <a:t>Auditoria e resposta a recursos ficam difíceis</a:t>
-            </a:r>
-          </a:p>
-          <a:p>
-            <a:pPr lvl="0"/>
-            <a:r>
-              <a:rPr/>
-              <a:t>Maior exposição de dados pessoais (risco LGPD)</a:t>
+              <a:rPr b="1"/>
+              <a:t>Vulnerabilidade LGPD:</a:t>
+            </a:r>
+            <a:r>
+              <a:rPr/>
+              <a:t> Dados sensíveis de candidatos circulando sem controle em caixas de e-mail.</a:t>
             </a:r>
           </a:p>
         </p:txBody>
@@ -3830,7 +3803,12 @@
             <p:ph type="title"/>
           </p:nvPr>
         </p:nvSpPr>
-        <p:spPr/>
+        <p:spPr>
+          <a:xfrm>
+            <a:off x="457201" y="204787"/>
+            <a:ext cx="3008313" cy="871538"/>
+          </a:xfrm>
+        </p:spPr>
         <p:txBody>
           <a:bodyPr/>
           <a:lstStyle/>
@@ -3840,55 +3818,127 @@
             </a:pPr>
             <a:r>
               <a:rPr/>
-              <a:t>Solução</a:t>
-            </a:r>
-          </a:p>
-        </p:txBody>
-      </p:sp>
-      <p:sp>
-        <p:nvSpPr>
-          <p:cNvPr id="3" name="Content Placeholder 2"/>
-          <p:cNvSpPr>
-            <a:spLocks noGrp="1"/>
-          </p:cNvSpPr>
-          <p:nvPr>
-            <p:ph idx="1"/>
-          </p:nvPr>
-        </p:nvSpPr>
-        <p:spPr/>
-        <p:txBody>
-          <a:bodyPr/>
-          <a:lstStyle/>
+              <a:t>A Solução: Centralização com Rastreabilidade</a:t>
+            </a:r>
+          </a:p>
+        </p:txBody>
+      </p:sp>
+      <p:sp>
+        <p:nvSpPr>
+          <p:cNvPr id="4" name="Text Placeholder 3"/>
+          <p:cNvSpPr>
+            <a:spLocks noGrp="1"/>
+          </p:cNvSpPr>
+          <p:nvPr>
+            <p:ph idx="2" sz="half" type="body"/>
+          </p:nvPr>
+        </p:nvSpPr>
+        <p:spPr/>
+        <p:txBody>
+          <a:bodyPr/>
+          <a:lstStyle/>
+          <a:p>
+            <a:pPr lvl="0" indent="0" marL="0">
+              <a:buNone/>
+            </a:pPr>
+            <a:r>
+              <a:rPr/>
+              <a:t>Um ambiente único que garante </a:t>
+            </a:r>
+            <a:r>
+              <a:rPr b="1"/>
+              <a:t>governança</a:t>
+            </a:r>
+            <a:r>
+              <a:rPr/>
+              <a:t> do início ao fim.</a:t>
+            </a:r>
+          </a:p>
           <a:p>
             <a:pPr lvl="0"/>
             <a:r>
-              <a:rPr/>
-              <a:t>Fluxo único: inscrição → avaliação → consolidação → ranking → comunicação</a:t>
+              <a:rPr b="1"/>
+              <a:t>Fluxo End-to-End:</a:t>
+            </a:r>
+            <a:r>
+              <a:rPr/>
+              <a:t> </a:t>
+            </a:r>
+            <a:r>
+              <a:rPr>
+                <a:hlinkClick r:id="rId2"/>
+              </a:rPr>
+              <a:t>Inscrição</a:t>
+            </a:r>
+            <a:r>
+              <a:rPr/>
+              <a:t> → </a:t>
+            </a:r>
+            <a:r>
+              <a:rPr>
+                <a:hlinkClick r:id="rId3"/>
+              </a:rPr>
+              <a:t>Avaliação</a:t>
+            </a:r>
+            <a:r>
+              <a:rPr/>
+              <a:t> → Consolidação → Resultado.</a:t>
             </a:r>
           </a:p>
           <a:p>
             <a:pPr lvl="0"/>
             <a:r>
-              <a:rPr/>
-              <a:t>Avaliação multicritério por múltiplos avaliadores + comissão</a:t>
+              <a:rPr b="1"/>
+              <a:t>Transparência Total:</a:t>
+            </a:r>
+            <a:r>
+              <a:rPr/>
+              <a:t> O candidato acompanha cada etapa, reduzindo a desconfiança e a judicialização.</a:t>
             </a:r>
           </a:p>
           <a:p>
             <a:pPr lvl="0"/>
             <a:r>
-              <a:rPr/>
-              <a:t>Transparência para o candidato e governança para a organização</a:t>
-            </a:r>
-          </a:p>
-          <a:p>
-            <a:pPr lvl="0"/>
-            <a:r>
-              <a:rPr/>
-              <a:t>Privacidade por padrão e menos risco de conformidade</a:t>
-            </a:r>
-          </a:p>
-        </p:txBody>
-      </p:sp>
+              <a:rPr b="1"/>
+              <a:t>Eficiência:</a:t>
+            </a:r>
+            <a:r>
+              <a:rPr/>
+              <a:t> Eliminação de retrabalho manual e erros de consolidação.</a:t>
+            </a:r>
+          </a:p>
+        </p:txBody>
+      </p:sp>
+      <p:pic>
+        <p:nvPicPr>
+          <p:cNvPr descr="prints/manual/fig-46-comissao-campos-notas-calculadas.png" id="0" name="Picture 1"/>
+          <p:cNvPicPr>
+            <a:picLocks noGrp="1" noChangeAspect="1"/>
+          </p:cNvPicPr>
+          <p:nvPr/>
+        </p:nvPicPr>
+        <p:blipFill>
+          <a:blip r:embed="rId4"/>
+          <a:stretch>
+            <a:fillRect/>
+          </a:stretch>
+        </p:blipFill>
+        <p:spPr bwMode="auto">
+          <a:xfrm>
+            <a:off x="3568700" y="1206500"/>
+            <a:ext cx="5105400" cy="2374900"/>
+          </a:xfrm>
+          <a:prstGeom prst="rect">
+            <a:avLst/>
+          </a:prstGeom>
+          <a:noFill/>
+          <a:ln w="9525">
+            <a:noFill/>
+            <a:headEnd/>
+            <a:tailEnd/>
+          </a:ln>
+        </p:spPr>
+      </p:pic>
     </p:spTree>
   </p:cSld>
 </p:sld>
@@ -3936,7 +3986,7 @@
             </a:pPr>
             <a:r>
               <a:rPr/>
-              <a:t>Evidência de integridade verificável</a:t>
+              <a:t>Diferencial: Blindagem Jurídica (Tecnologia)</a:t>
             </a:r>
           </a:p>
         </p:txBody>
@@ -3961,36 +4011,55 @@
             </a:pPr>
             <a:r>
               <a:rPr/>
-              <a:t>PDF de protocolo com </a:t>
+              <a:t>Não é apenas software, é </a:t>
             </a:r>
             <a:r>
               <a:rPr b="1"/>
-              <a:t>hash SHA-256 verificável</a:t>
-            </a:r>
-            <a:r>
-              <a:rPr/>
-              <a:t>.</a:t>
+              <a:t>segurança jurídica</a:t>
+            </a:r>
+            <a:r>
+              <a:rPr/>
+              <a:t> via tecnologia.</a:t>
             </a:r>
           </a:p>
           <a:p>
             <a:pPr lvl="0"/>
             <a:r>
-              <a:rPr/>
-              <a:t>Reduz disputa por versões</a:t>
+              <a:rPr b="1"/>
+              <a:t>Prova de Integridade (Hash SHA-256):</a:t>
+            </a:r>
+            <a:r>
+              <a:rPr/>
+              <a:t> Cada documento recebe um selo criptográfico imutável. Garantia matemática de que o avaliado é o submetido.</a:t>
             </a:r>
           </a:p>
           <a:p>
             <a:pPr lvl="0"/>
             <a:r>
-              <a:rPr/>
-              <a:t>Comprova o que foi submetido</a:t>
+              <a:rPr b="1"/>
+              <a:t>Auditoria Instantânea:</a:t>
+            </a:r>
+            <a:r>
+              <a:rPr/>
+              <a:t> Em caso de recurso, a prova técnica está pronta em segundos.</a:t>
+            </a:r>
+          </a:p>
+          <a:p>
+            <a:pPr lvl="0"/>
+            <a:r>
+              <a:rPr b="1"/>
+              <a:t>Fim das Disputas:</a:t>
+            </a:r>
+            <a:r>
+              <a:rPr/>
+              <a:t> Elimina dúvidas sobre “qual versão vale”.</a:t>
             </a:r>
           </a:p>
         </p:txBody>
       </p:sp>
       <p:pic>
         <p:nvPicPr>
-          <p:cNvPr descr="../prints/manual/fig-17-pdf-protocolo-hash.png" id="0" name="Picture 1"/>
+          <p:cNvPr descr="prints/manual/fig-17-pdf-protocolo-hash.png" id="0" name="Picture 1"/>
           <p:cNvPicPr>
             <a:picLocks noGrp="1" noChangeAspect="1"/>
           </p:cNvPicPr>
@@ -4065,7 +4134,7 @@
             </a:pPr>
             <a:r>
               <a:rPr/>
-              <a:t>Privacidade e minimização de dados</a:t>
+              <a:t>Privacidade e Compliance (LGPD)</a:t>
             </a:r>
           </a:p>
         </p:txBody>
@@ -4085,36 +4154,60 @@
           <a:bodyPr/>
           <a:lstStyle/>
           <a:p>
+            <a:pPr lvl="0" indent="0" marL="0">
+              <a:buNone/>
+            </a:pPr>
+            <a:r>
+              <a:rPr/>
+              <a:t>Proteção de dados como </a:t>
+            </a:r>
+            <a:r>
+              <a:rPr b="1"/>
+              <a:t>vantagem competitiva</a:t>
+            </a:r>
+            <a:r>
+              <a:rPr/>
+              <a:t>, não apenas obrigação.</a:t>
+            </a:r>
+          </a:p>
+          <a:p>
             <a:pPr lvl="0"/>
             <a:r>
-              <a:rPr/>
-              <a:t>Bloqueio de duplicidade por CPF via </a:t>
-            </a:r>
-            <a:r>
               <a:rPr b="1"/>
-              <a:t>HMAC</a:t>
-            </a:r>
-            <a:r>
-              <a:rPr/>
-              <a:t> (sem CPF em claro)</a:t>
+              <a:t>Blind Review Real:</a:t>
+            </a:r>
+            <a:r>
+              <a:rPr/>
+              <a:t> Avaliadores focam no mérito, sem acesso a dados pessoais (viés reduzido).</a:t>
             </a:r>
           </a:p>
           <a:p>
             <a:pPr lvl="0"/>
             <a:r>
               <a:rPr b="1"/>
-              <a:t>Blind review</a:t>
-            </a:r>
-            <a:r>
-              <a:rPr/>
-              <a:t> reduz exposição de dados identificadores</a:t>
+              <a:t>Anonimização Segura (HMAC):</a:t>
+            </a:r>
+            <a:r>
+              <a:rPr/>
+              <a:t> Validação de unicidade (CPF) sem expor o dado real.</a:t>
+            </a:r>
+          </a:p>
+          <a:p>
+            <a:pPr lvl="0"/>
+            <a:r>
+              <a:rPr b="1"/>
+              <a:t>Segurança por Design:</a:t>
+            </a:r>
+            <a:r>
+              <a:rPr/>
+              <a:t> Minimização de dados desde a arquitetura.</a:t>
             </a:r>
           </a:p>
         </p:txBody>
       </p:sp>
       <p:pic>
         <p:nvPicPr>
-          <p:cNvPr descr="../prints/manual/fig-11-blind-review-alerta-dados-pessoais.png" id="0" name="Picture 1"/>
+          <p:cNvPr descr="prints/manual/fig-10-blind-review-exemplo-dados-pessoais.png" id="0" name="Picture 1"/>
           <p:cNvPicPr>
             <a:picLocks noGrp="1" noChangeAspect="1"/>
           </p:cNvPicPr>
@@ -4128,8 +4221,8 @@
         </p:blipFill>
         <p:spPr bwMode="auto">
           <a:xfrm>
-            <a:off x="3568700" y="368300"/>
-            <a:ext cx="5105400" cy="4051300"/>
+            <a:off x="3568700" y="457200"/>
+            <a:ext cx="5105400" cy="3886200"/>
           </a:xfrm>
           <a:prstGeom prst="rect">
             <a:avLst/>
@@ -4184,7 +4277,7 @@
             </a:pPr>
             <a:r>
               <a:rPr/>
-              <a:t>Produto e viabilidade técnica</a:t>
+              <a:t>Mercado: Busca por Conformidade</a:t>
             </a:r>
           </a:p>
         </p:txBody>
@@ -4204,47 +4297,69 @@
           <a:bodyPr/>
           <a:lstStyle/>
           <a:p>
+            <a:pPr lvl="0" indent="0" marL="0">
+              <a:buNone/>
+            </a:pPr>
+            <a:r>
+              <a:rPr/>
+              <a:t>Um oceano azul em meio a ferramentas genéricas de eventos.</a:t>
+            </a:r>
+          </a:p>
+          <a:p>
             <a:pPr lvl="0"/>
             <a:r>
-              <a:rPr/>
-              <a:t>Núcleo funcional em </a:t>
-            </a:r>
-            <a:r>
               <a:rPr b="1"/>
-              <a:t>Node.js (Express)</a:t>
-            </a:r>
-            <a:r>
-              <a:rPr/>
-              <a:t> + frontend</a:t>
+              <a:t>TAM (Mercado Total):</a:t>
+            </a:r>
+            <a:r>
+              <a:rPr/>
+              <a:t> </a:t>
+            </a:r>
+            <a:r>
+              <a:rPr b="1"/>
+              <a:t>R$ 14,6 Bilhões</a:t>
+            </a:r>
+            <a:r>
+              <a:rPr/>
+              <a:t> (Orçamento MCTI 2024 para Ciência e Tecnologia).</a:t>
             </a:r>
           </a:p>
           <a:p>
             <a:pPr lvl="0"/>
             <a:r>
-              <a:rPr/>
-              <a:t>Inscrição, avaliação e recursos já operacionais</a:t>
+              <a:rPr b="1"/>
+              <a:t>SAM (Nosso Foco):</a:t>
+            </a:r>
+            <a:r>
+              <a:rPr/>
+              <a:t> </a:t>
+            </a:r>
+            <a:r>
+              <a:rPr b="1"/>
+              <a:t>+100 Fundações de Apoio</a:t>
+            </a:r>
+            <a:r>
+              <a:rPr/>
+              <a:t> (CONFIES) e </a:t>
+            </a:r>
+            <a:r>
+              <a:rPr b="1"/>
+              <a:t>110 Instituições Federais</a:t>
+            </a:r>
+            <a:r>
+              <a:rPr/>
+              <a:t> (69 Univ. + 41 IFs) que gerem esses recursos.</a:t>
             </a:r>
           </a:p>
           <a:p>
             <a:pPr lvl="0"/>
             <a:r>
-              <a:rPr/>
-              <a:t>PDF (protocolo + hash), e-mails transacionais e exportação CSV</a:t>
-            </a:r>
-          </a:p>
-          <a:p>
-            <a:pPr lvl="0"/>
-            <a:r>
-              <a:rPr/>
-              <a:t>Storage em JSON (com opção de </a:t>
-            </a:r>
-            <a:r>
               <a:rPr b="1"/>
-              <a:t>PostgreSQL</a:t>
-            </a:r>
-            <a:r>
-              <a:rPr/>
-              <a:t> por configuração)</a:t>
+              <a:t>SOM (Meta 2 anos):</a:t>
+            </a:r>
+            <a:r>
+              <a:rPr/>
+              <a:t> Validar em 5 Fundações (Bahia/Nordeste) e expandir para 50 instituições.</a:t>
             </a:r>
           </a:p>
         </p:txBody>
@@ -4296,7 +4411,7 @@
             </a:pPr>
             <a:r>
               <a:rPr/>
-              <a:t>Painel administrativo e rastreabilidade</a:t>
+              <a:t>Por que o Avalia+Tec? (Concorrência)</a:t>
             </a:r>
           </a:p>
         </p:txBody>
@@ -4316,58 +4431,376 @@
           <a:bodyPr/>
           <a:lstStyle/>
           <a:p>
-            <a:pPr lvl="0"/>
-            <a:r>
-              <a:rPr/>
-              <a:t>Acompanha inscrições, avaliações e resultados</a:t>
-            </a:r>
-          </a:p>
-          <a:p>
-            <a:pPr lvl="0"/>
-            <a:r>
-              <a:rPr/>
-              <a:t>Trilha auditável: logs estruturados + ID de requisição + histórico</a:t>
-            </a:r>
-          </a:p>
-          <a:p>
-            <a:pPr lvl="0"/>
-            <a:r>
-              <a:rPr/>
-              <a:t>Calendário por edital e bloqueio fora de janela</a:t>
-            </a:r>
-          </a:p>
-        </p:txBody>
-      </p:sp>
-      <p:pic>
-        <p:nvPicPr>
-          <p:cNvPr descr="../prints/manual/fig-24-admin-dashboard-tabela-protocolo.png" id="0" name="Picture 1"/>
-          <p:cNvPicPr>
-            <a:picLocks noGrp="1" noChangeAspect="1"/>
-          </p:cNvPicPr>
-          <p:nvPr/>
-        </p:nvPicPr>
-        <p:blipFill>
-          <a:blip r:embed="rId2"/>
-          <a:stretch>
-            <a:fillRect/>
-          </a:stretch>
-        </p:blipFill>
-        <p:spPr bwMode="auto">
-          <a:xfrm>
-            <a:off x="3568700" y="1219200"/>
-            <a:ext cx="5105400" cy="2336800"/>
-          </a:xfrm>
-          <a:prstGeom prst="rect">
-            <a:avLst/>
-          </a:prstGeom>
-          <a:noFill/>
-          <a:ln w="9525">
-            <a:noFill/>
-            <a:headEnd/>
-            <a:tailEnd/>
-          </a:ln>
-        </p:spPr>
-      </p:pic>
+            <a:pPr lvl="0" indent="0" marL="0">
+              <a:buNone/>
+            </a:pPr>
+            <a:r>
+              <a:rPr/>
+              <a:t>Ferramentas de </a:t>
+            </a:r>
+            <a:r>
+              <a:rPr b="1"/>
+              <a:t>eventos</a:t>
+            </a:r>
+            <a:r>
+              <a:rPr/>
+              <a:t> não entregam </a:t>
+            </a:r>
+            <a:r>
+              <a:rPr b="1"/>
+              <a:t>segurança jurídica</a:t>
+            </a:r>
+            <a:r>
+              <a:rPr/>
+              <a:t>.</a:t>
+            </a:r>
+          </a:p>
+        </p:txBody>
+      </p:sp>
+      <p:graphicFrame>
+        <p:nvGraphicFramePr>
+          <p:cNvPr id="6" name="Content Placeholder 5"/>
+          <p:cNvGraphicFramePr>
+            <a:graphicFrameLocks noGrp="1"/>
+          </p:cNvGraphicFramePr>
+          <p:nvPr>
+            <p:ph idx="1"/>
+          </p:nvPr>
+        </p:nvGraphicFramePr>
+        <p:xfrm>
+          <a:off x="3568700" y="203200"/>
+          <a:ext cx="5105400" cy="4381500"/>
+        </p:xfrm>
+        <a:graphic>
+          <a:graphicData uri="http://schemas.openxmlformats.org/drawingml/2006/table">
+            <a:tbl>
+              <a:tblPr firstRow="1" bandRow="1">
+                <a:tableStyleId>{5C22544A-7EE6-4342-B048-85BDC9FD1C3A}</a:tableStyleId>
+              </a:tblPr>
+              <a:tblGrid>
+                <a:gridCol w="1079500"/>
+                <a:gridCol w="1346200"/>
+                <a:gridCol w="1346200"/>
+                <a:gridCol w="1346200"/>
+              </a:tblGrid>
+              <a:tr h="0">
+                <a:tc>
+                  <a:txBody>
+                    <a:bodyPr/>
+                    <a:lstStyle/>
+                    <a:p>
+                      <a:pPr lvl="0" indent="0" marL="0" algn="l">
+                        <a:buNone/>
+                      </a:pPr>
+                      <a:r>
+                        <a:rPr/>
+                        <a:t>Característica</a:t>
+                      </a:r>
+                    </a:p>
+                  </a:txBody>
+                  <a:tcPr/>
+                </a:tc>
+                <a:tc>
+                  <a:txBody>
+                    <a:bodyPr/>
+                    <a:lstStyle/>
+                    <a:p>
+                      <a:pPr lvl="0" indent="0" marL="0" algn="ctr">
+                        <a:buNone/>
+                      </a:pPr>
+                      <a:r>
+                        <a:rPr/>
+                        <a:t>Even3 / Doity</a:t>
+                      </a:r>
+                    </a:p>
+                  </a:txBody>
+                  <a:tcPr/>
+                </a:tc>
+                <a:tc>
+                  <a:txBody>
+                    <a:bodyPr/>
+                    <a:lstStyle/>
+                    <a:p>
+                      <a:pPr lvl="0" indent="0" marL="0" algn="ctr">
+                        <a:buNone/>
+                      </a:pPr>
+                      <a:r>
+                        <a:rPr/>
+                        <a:t>Google Forms</a:t>
+                      </a:r>
+                    </a:p>
+                  </a:txBody>
+                  <a:tcPr/>
+                </a:tc>
+                <a:tc>
+                  <a:txBody>
+                    <a:bodyPr/>
+                    <a:lstStyle/>
+                    <a:p>
+                      <a:pPr lvl="0" indent="0" marL="0" algn="ctr">
+                        <a:buNone/>
+                      </a:pPr>
+                      <a:r>
+                        <a:rPr b="1"/>
+                        <a:t>Avalia+Tec</a:t>
+                      </a:r>
+                    </a:p>
+                  </a:txBody>
+                  <a:tcPr/>
+                </a:tc>
+              </a:tr>
+              <a:tr h="0">
+                <a:tc>
+                  <a:txBody>
+                    <a:bodyPr/>
+                    <a:lstStyle/>
+                    <a:p>
+                      <a:pPr lvl="0" indent="0" marL="0" algn="l">
+                        <a:buNone/>
+                      </a:pPr>
+                      <a:r>
+                        <a:rPr b="1"/>
+                        <a:t>Foco Principal</a:t>
+                      </a:r>
+                    </a:p>
+                  </a:txBody>
+                </a:tc>
+                <a:tc>
+                  <a:txBody>
+                    <a:bodyPr/>
+                    <a:lstStyle/>
+                    <a:p>
+                      <a:pPr lvl="0" indent="0" marL="0" algn="ctr">
+                        <a:buNone/>
+                      </a:pPr>
+                      <a:r>
+                        <a:rPr/>
+                        <a:t>Congressos/Eventos</a:t>
+                      </a:r>
+                    </a:p>
+                  </a:txBody>
+                </a:tc>
+                <a:tc>
+                  <a:txBody>
+                    <a:bodyPr/>
+                    <a:lstStyle/>
+                    <a:p>
+                      <a:pPr lvl="0" indent="0" marL="0" algn="ctr">
+                        <a:buNone/>
+                      </a:pPr>
+                      <a:r>
+                        <a:rPr/>
+                        <a:t>Pesquisas</a:t>
+                      </a:r>
+                    </a:p>
+                  </a:txBody>
+                </a:tc>
+                <a:tc>
+                  <a:txBody>
+                    <a:bodyPr/>
+                    <a:lstStyle/>
+                    <a:p>
+                      <a:pPr lvl="0" indent="0" marL="0" algn="ctr">
+                        <a:buNone/>
+                      </a:pPr>
+                      <a:r>
+                        <a:rPr b="1"/>
+                        <a:t>Seleções/Editais</a:t>
+                      </a:r>
+                    </a:p>
+                  </a:txBody>
+                </a:tc>
+              </a:tr>
+              <a:tr h="0">
+                <a:tc>
+                  <a:txBody>
+                    <a:bodyPr/>
+                    <a:lstStyle/>
+                    <a:p>
+                      <a:pPr lvl="0" indent="0" marL="0" algn="l">
+                        <a:buNone/>
+                      </a:pPr>
+                      <a:r>
+                        <a:rPr b="1"/>
+                        <a:t>Gestão de Banca</a:t>
+                      </a:r>
+                    </a:p>
+                  </a:txBody>
+                </a:tc>
+                <a:tc>
+                  <a:txBody>
+                    <a:bodyPr/>
+                    <a:lstStyle/>
+                    <a:p>
+                      <a:pPr lvl="0" indent="0" marL="0" algn="ctr">
+                        <a:buNone/>
+                      </a:pPr>
+                      <a:r>
+                        <a:rPr/>
+                        <a:t>Foco Acadêmico</a:t>
+                      </a:r>
+                    </a:p>
+                  </a:txBody>
+                </a:tc>
+                <a:tc>
+                  <a:txBody>
+                    <a:bodyPr/>
+                    <a:lstStyle/>
+                    <a:p>
+                      <a:pPr lvl="0" indent="0" marL="0" algn="ctr">
+                        <a:buNone/>
+                      </a:pPr>
+                      <a:r>
+                        <a:rPr/>
+                        <a:t>Manual</a:t>
+                      </a:r>
+                    </a:p>
+                  </a:txBody>
+                </a:tc>
+                <a:tc>
+                  <a:txBody>
+                    <a:bodyPr/>
+                    <a:lstStyle/>
+                    <a:p>
+                      <a:pPr lvl="0" indent="0" marL="0" algn="ctr">
+                        <a:buNone/>
+                      </a:pPr>
+                      <a:r>
+                        <a:rPr b="1"/>
+                        <a:t>Auditável</a:t>
+                      </a:r>
+                    </a:p>
+                  </a:txBody>
+                </a:tc>
+              </a:tr>
+              <a:tr h="0">
+                <a:tc>
+                  <a:txBody>
+                    <a:bodyPr/>
+                    <a:lstStyle/>
+                    <a:p>
+                      <a:pPr lvl="0" indent="0" marL="0" algn="l">
+                        <a:buNone/>
+                      </a:pPr>
+                      <a:r>
+                        <a:rPr b="1"/>
+                        <a:t>Integridade</a:t>
+                      </a:r>
+                    </a:p>
+                  </a:txBody>
+                </a:tc>
+                <a:tc>
+                  <a:txBody>
+                    <a:bodyPr/>
+                    <a:lstStyle/>
+                    <a:p>
+                      <a:pPr lvl="0" indent="0" marL="0" algn="ctr">
+                        <a:buNone/>
+                      </a:pPr>
+                      <a:r>
+                        <a:rPr/>
+                        <a:t>Nenhuma</a:t>
+                      </a:r>
+                    </a:p>
+                  </a:txBody>
+                </a:tc>
+                <a:tc>
+                  <a:txBody>
+                    <a:bodyPr/>
+                    <a:lstStyle/>
+                    <a:p>
+                      <a:pPr lvl="0" indent="0" marL="0" algn="ctr">
+                        <a:buNone/>
+                      </a:pPr>
+                      <a:r>
+                        <a:rPr/>
+                        <a:t>Nenhuma</a:t>
+                      </a:r>
+                    </a:p>
+                  </a:txBody>
+                </a:tc>
+                <a:tc>
+                  <a:txBody>
+                    <a:bodyPr/>
+                    <a:lstStyle/>
+                    <a:p>
+                      <a:pPr lvl="0" indent="0" marL="0" algn="ctr">
+                        <a:buNone/>
+                      </a:pPr>
+                      <a:r>
+                        <a:rPr b="1"/>
+                        <a:t>Hash SHA-256</a:t>
+                      </a:r>
+                    </a:p>
+                  </a:txBody>
+                </a:tc>
+              </a:tr>
+              <a:tr h="0">
+                <a:tc>
+                  <a:txBody>
+                    <a:bodyPr/>
+                    <a:lstStyle/>
+                    <a:p>
+                      <a:pPr lvl="0" indent="0" marL="0" algn="l">
+                        <a:buNone/>
+                      </a:pPr>
+                      <a:r>
+                        <a:rPr b="1"/>
+                        <a:t>Risco Jurídico</a:t>
+                      </a:r>
+                    </a:p>
+                  </a:txBody>
+                </a:tc>
+                <a:tc>
+                  <a:txBody>
+                    <a:bodyPr/>
+                    <a:lstStyle/>
+                    <a:p>
+                      <a:pPr lvl="0" indent="0" marL="0" algn="ctr">
+                        <a:buNone/>
+                      </a:pPr>
+                      <a:r>
+                        <a:rPr/>
+                        <a:t>Médio</a:t>
+                      </a:r>
+                    </a:p>
+                  </a:txBody>
+                </a:tc>
+                <a:tc>
+                  <a:txBody>
+                    <a:bodyPr/>
+                    <a:lstStyle/>
+                    <a:p>
+                      <a:pPr lvl="0" indent="0" marL="0" algn="ctr">
+                        <a:buNone/>
+                      </a:pPr>
+                      <a:r>
+                        <a:rPr/>
+                        <a:t>Alto</a:t>
+                      </a:r>
+                    </a:p>
+                  </a:txBody>
+                </a:tc>
+                <a:tc>
+                  <a:txBody>
+                    <a:bodyPr/>
+                    <a:lstStyle/>
+                    <a:p>
+                      <a:pPr lvl="0" indent="0" marL="0" algn="ctr">
+                        <a:buNone/>
+                      </a:pPr>
+                      <a:r>
+                        <a:rPr b="1"/>
+                        <a:t>Blindado</a:t>
+                      </a:r>
+                    </a:p>
+                  </a:txBody>
+                </a:tc>
+              </a:tr>
+            </a:tbl>
+          </a:graphicData>
+        </a:graphic>
+      </p:graphicFrame>
     </p:spTree>
   </p:cSld>
 </p:sld>

--- a/projeto_centelha/PITCH_DECK.pptx
+++ b/projeto_centelha/PITCH_DECK.pptx
@@ -4,6 +4,9 @@
   <p:sldMasterIdLst>
     <p:sldMasterId id="2147483667" r:id="rId1"/>
   </p:sldMasterIdLst>
+  <p:notesMasterIdLst>
+    <p:notesMasterId r:id="rId15"/>
+  </p:notesMasterIdLst>
   <p:sldIdLst>
     <p:sldId id="256" r:id="rId2"/>
     <p:sldId id="257" r:id="rId3"/>
@@ -43,6 +46,497 @@
     </p:ext>
   </p:extLst>
 </p:presentation>
+</file>
+
+<file path=ppt/notesMasters/notesMaster1.xml><?xml version="1.0" encoding="utf-8"?>
+<p:notesMaster xmlns:a="http://schemas.openxmlformats.org/drawingml/2006/main" xmlns:r="http://schemas.openxmlformats.org/officeDocument/2006/relationships" xmlns:p="http://schemas.openxmlformats.org/presentationml/2006/main">
+  <p:cSld>
+    <p:bg>
+      <p:bgRef idx="1001">
+        <a:schemeClr val="bg1"/>
+      </p:bgRef>
+    </p:bg>
+    <p:spTree>
+      <p:nvGrpSpPr>
+        <p:cNvPr id="1" name=""/>
+        <p:cNvGrpSpPr/>
+        <p:nvPr/>
+      </p:nvGrpSpPr>
+      <p:grpSpPr>
+        <a:xfrm>
+          <a:off x="0" y="0"/>
+          <a:ext cx="0" cy="0"/>
+          <a:chOff x="0" y="0"/>
+          <a:chExt cx="0" cy="0"/>
+        </a:xfrm>
+      </p:grpSpPr>
+      <p:sp>
+        <p:nvSpPr>
+          <p:cNvPr id="2" name="Espaço Reservado para Cabeçalho 1"/>
+          <p:cNvSpPr>
+            <a:spLocks noGrp="1"/>
+          </p:cNvSpPr>
+          <p:nvPr>
+            <p:ph type="hdr" sz="quarter"/>
+          </p:nvPr>
+        </p:nvSpPr>
+        <p:spPr>
+          <a:xfrm>
+            <a:off x="0" y="0"/>
+            <a:ext cx="5283200" cy="344488"/>
+          </a:xfrm>
+          <a:prstGeom prst="rect">
+            <a:avLst/>
+          </a:prstGeom>
+        </p:spPr>
+        <p:txBody>
+          <a:bodyPr vert="horz" lIns="91440" tIns="45720" rIns="91440" bIns="45720" rtlCol="0"/>
+          <a:lstStyle>
+            <a:lvl1pPr algn="l">
+              <a:defRPr sz="1200"/>
+            </a:lvl1pPr>
+          </a:lstStyle>
+          <a:p>
+            <a:endParaRPr lang="pt-BR"/>
+          </a:p>
+        </p:txBody>
+      </p:sp>
+      <p:sp>
+        <p:nvSpPr>
+          <p:cNvPr id="3" name="Espaço Reservado para Data 2"/>
+          <p:cNvSpPr>
+            <a:spLocks noGrp="1"/>
+          </p:cNvSpPr>
+          <p:nvPr>
+            <p:ph type="dt" idx="1"/>
+          </p:nvPr>
+        </p:nvSpPr>
+        <p:spPr>
+          <a:xfrm>
+            <a:off x="6905625" y="0"/>
+            <a:ext cx="5283200" cy="344488"/>
+          </a:xfrm>
+          <a:prstGeom prst="rect">
+            <a:avLst/>
+          </a:prstGeom>
+        </p:spPr>
+        <p:txBody>
+          <a:bodyPr vert="horz" lIns="91440" tIns="45720" rIns="91440" bIns="45720" rtlCol="0"/>
+          <a:lstStyle>
+            <a:lvl1pPr algn="r">
+              <a:defRPr sz="1200"/>
+            </a:lvl1pPr>
+          </a:lstStyle>
+          <a:p>
+            <a:fld id="{A2939D32-4D7A-C849-931F-0023472BA975}" type="datetimeFigureOut">
+              <a:rPr lang="pt-BR" smtClean="0"/>
+              <a:t>28/10/2025</a:t>
+            </a:fld>
+            <a:endParaRPr lang="pt-BR"/>
+          </a:p>
+        </p:txBody>
+      </p:sp>
+      <p:sp>
+        <p:nvSpPr>
+          <p:cNvPr id="4" name="Espaço Reservado para Imagem de Slide 3"/>
+          <p:cNvSpPr>
+            <a:spLocks noGrp="1" noRot="1" noChangeAspect="1"/>
+          </p:cNvSpPr>
+          <p:nvPr>
+            <p:ph type="sldImg" idx="2"/>
+          </p:nvPr>
+        </p:nvSpPr>
+        <p:spPr>
+          <a:xfrm>
+            <a:off x="4038600" y="857250"/>
+            <a:ext cx="4114800" cy="2314575"/>
+          </a:xfrm>
+          <a:prstGeom prst="rect">
+            <a:avLst/>
+          </a:prstGeom>
+          <a:noFill/>
+          <a:ln w="12700">
+            <a:solidFill>
+              <a:prstClr val="black"/>
+            </a:solidFill>
+          </a:ln>
+        </p:spPr>
+        <p:txBody>
+          <a:bodyPr vert="horz" lIns="91440" tIns="45720" rIns="91440" bIns="45720" rtlCol="0" anchor="ctr"/>
+          <a:lstStyle/>
+          <a:p>
+            <a:endParaRPr lang="pt-BR"/>
+          </a:p>
+        </p:txBody>
+      </p:sp>
+      <p:sp>
+        <p:nvSpPr>
+          <p:cNvPr id="5" name="Espaço Reservado para Anotações 4"/>
+          <p:cNvSpPr>
+            <a:spLocks noGrp="1"/>
+          </p:cNvSpPr>
+          <p:nvPr>
+            <p:ph type="body" sz="quarter" idx="3"/>
+          </p:nvPr>
+        </p:nvSpPr>
+        <p:spPr>
+          <a:xfrm>
+            <a:off x="1219200" y="3300413"/>
+            <a:ext cx="9753600" cy="2700337"/>
+          </a:xfrm>
+          <a:prstGeom prst="rect">
+            <a:avLst/>
+          </a:prstGeom>
+        </p:spPr>
+        <p:txBody>
+          <a:bodyPr vert="horz" lIns="91440" tIns="45720" rIns="91440" bIns="45720" rtlCol="0"/>
+          <a:lstStyle/>
+          <a:p>
+            <a:pPr lvl="0"/>
+            <a:r>
+              <a:rPr lang="pt-BR"/>
+              <a:t>Clique para editar os estilos de texto Mestres</a:t>
+            </a:r>
+          </a:p>
+          <a:p>
+            <a:pPr lvl="1"/>
+            <a:r>
+              <a:rPr lang="pt-BR"/>
+              <a:t>Segundo nível</a:t>
+            </a:r>
+          </a:p>
+          <a:p>
+            <a:pPr lvl="2"/>
+            <a:r>
+              <a:rPr lang="pt-BR"/>
+              <a:t>Terceiro nível</a:t>
+            </a:r>
+          </a:p>
+          <a:p>
+            <a:pPr lvl="3"/>
+            <a:r>
+              <a:rPr lang="pt-BR"/>
+              <a:t>Quarto nível</a:t>
+            </a:r>
+          </a:p>
+          <a:p>
+            <a:pPr lvl="4"/>
+            <a:r>
+              <a:rPr lang="pt-BR"/>
+              <a:t>Quinto nível</a:t>
+            </a:r>
+          </a:p>
+        </p:txBody>
+      </p:sp>
+      <p:sp>
+        <p:nvSpPr>
+          <p:cNvPr id="6" name="Espaço Reservado para Rodapé 5"/>
+          <p:cNvSpPr>
+            <a:spLocks noGrp="1"/>
+          </p:cNvSpPr>
+          <p:nvPr>
+            <p:ph type="ftr" sz="quarter" idx="4"/>
+          </p:nvPr>
+        </p:nvSpPr>
+        <p:spPr>
+          <a:xfrm>
+            <a:off x="0" y="6513513"/>
+            <a:ext cx="5283200" cy="344487"/>
+          </a:xfrm>
+          <a:prstGeom prst="rect">
+            <a:avLst/>
+          </a:prstGeom>
+        </p:spPr>
+        <p:txBody>
+          <a:bodyPr vert="horz" lIns="91440" tIns="45720" rIns="91440" bIns="45720" rtlCol="0" anchor="b"/>
+          <a:lstStyle>
+            <a:lvl1pPr algn="l">
+              <a:defRPr sz="1200"/>
+            </a:lvl1pPr>
+          </a:lstStyle>
+          <a:p>
+            <a:endParaRPr lang="pt-BR"/>
+          </a:p>
+        </p:txBody>
+      </p:sp>
+      <p:sp>
+        <p:nvSpPr>
+          <p:cNvPr id="7" name="Espaço Reservado para Número de Slide 6"/>
+          <p:cNvSpPr>
+            <a:spLocks noGrp="1"/>
+          </p:cNvSpPr>
+          <p:nvPr>
+            <p:ph type="sldNum" sz="quarter" idx="5"/>
+          </p:nvPr>
+        </p:nvSpPr>
+        <p:spPr>
+          <a:xfrm>
+            <a:off x="6905625" y="6513513"/>
+            <a:ext cx="5283200" cy="344487"/>
+          </a:xfrm>
+          <a:prstGeom prst="rect">
+            <a:avLst/>
+          </a:prstGeom>
+        </p:spPr>
+        <p:txBody>
+          <a:bodyPr vert="horz" lIns="91440" tIns="45720" rIns="91440" bIns="45720" rtlCol="0" anchor="b"/>
+          <a:lstStyle>
+            <a:lvl1pPr algn="r">
+              <a:defRPr sz="1200"/>
+            </a:lvl1pPr>
+          </a:lstStyle>
+          <a:p>
+            <a:fld id="{E31B6F9E-5F11-604A-8433-C012402DF956}" type="slidenum">
+              <a:rPr lang="pt-BR" smtClean="0"/>
+              <a:t>‹nº›</a:t>
+            </a:fld>
+            <a:endParaRPr lang="pt-BR"/>
+          </a:p>
+        </p:txBody>
+      </p:sp>
+    </p:spTree>
+    <p:extLst>
+      <p:ext uri="{BB962C8B-B14F-4D97-AF65-F5344CB8AC3E}">
+        <p14:creationId xmlns:p14="http://schemas.microsoft.com/office/powerpoint/2010/main" val="331462006"/>
+      </p:ext>
+    </p:extLst>
+  </p:cSld>
+  <p:clrMap bg1="lt1" tx1="dk1" bg2="lt2" tx2="dk2" accent1="accent1" accent2="accent2" accent3="accent3" accent4="accent4" accent5="accent5" accent6="accent6" hlink="hlink" folHlink="folHlink"/>
+  <p:notesStyle>
+    <a:lvl1pPr marL="0" algn="l" defTabSz="914400" rtl="0" eaLnBrk="1" latinLnBrk="0" hangingPunct="1">
+      <a:defRPr sz="1200" kern="1200">
+        <a:solidFill>
+          <a:schemeClr val="tx1"/>
+        </a:solidFill>
+        <a:latin typeface="+mn-lt"/>
+        <a:ea typeface="+mn-ea"/>
+        <a:cs typeface="+mn-cs"/>
+      </a:defRPr>
+    </a:lvl1pPr>
+    <a:lvl2pPr marL="457200" algn="l" defTabSz="914400" rtl="0" eaLnBrk="1" latinLnBrk="0" hangingPunct="1">
+      <a:defRPr sz="1200" kern="1200">
+        <a:solidFill>
+          <a:schemeClr val="tx1"/>
+        </a:solidFill>
+        <a:latin typeface="+mn-lt"/>
+        <a:ea typeface="+mn-ea"/>
+        <a:cs typeface="+mn-cs"/>
+      </a:defRPr>
+    </a:lvl2pPr>
+    <a:lvl3pPr marL="914400" algn="l" defTabSz="914400" rtl="0" eaLnBrk="1" latinLnBrk="0" hangingPunct="1">
+      <a:defRPr sz="1200" kern="1200">
+        <a:solidFill>
+          <a:schemeClr val="tx1"/>
+        </a:solidFill>
+        <a:latin typeface="+mn-lt"/>
+        <a:ea typeface="+mn-ea"/>
+        <a:cs typeface="+mn-cs"/>
+      </a:defRPr>
+    </a:lvl3pPr>
+    <a:lvl4pPr marL="1371600" algn="l" defTabSz="914400" rtl="0" eaLnBrk="1" latinLnBrk="0" hangingPunct="1">
+      <a:defRPr sz="1200" kern="1200">
+        <a:solidFill>
+          <a:schemeClr val="tx1"/>
+        </a:solidFill>
+        <a:latin typeface="+mn-lt"/>
+        <a:ea typeface="+mn-ea"/>
+        <a:cs typeface="+mn-cs"/>
+      </a:defRPr>
+    </a:lvl4pPr>
+    <a:lvl5pPr marL="1828800" algn="l" defTabSz="914400" rtl="0" eaLnBrk="1" latinLnBrk="0" hangingPunct="1">
+      <a:defRPr sz="1200" kern="1200">
+        <a:solidFill>
+          <a:schemeClr val="tx1"/>
+        </a:solidFill>
+        <a:latin typeface="+mn-lt"/>
+        <a:ea typeface="+mn-ea"/>
+        <a:cs typeface="+mn-cs"/>
+      </a:defRPr>
+    </a:lvl5pPr>
+    <a:lvl6pPr marL="2286000" algn="l" defTabSz="914400" rtl="0" eaLnBrk="1" latinLnBrk="0" hangingPunct="1">
+      <a:defRPr sz="1200" kern="1200">
+        <a:solidFill>
+          <a:schemeClr val="tx1"/>
+        </a:solidFill>
+        <a:latin typeface="+mn-lt"/>
+        <a:ea typeface="+mn-ea"/>
+        <a:cs typeface="+mn-cs"/>
+      </a:defRPr>
+    </a:lvl6pPr>
+    <a:lvl7pPr marL="2743200" algn="l" defTabSz="914400" rtl="0" eaLnBrk="1" latinLnBrk="0" hangingPunct="1">
+      <a:defRPr sz="1200" kern="1200">
+        <a:solidFill>
+          <a:schemeClr val="tx1"/>
+        </a:solidFill>
+        <a:latin typeface="+mn-lt"/>
+        <a:ea typeface="+mn-ea"/>
+        <a:cs typeface="+mn-cs"/>
+      </a:defRPr>
+    </a:lvl7pPr>
+    <a:lvl8pPr marL="3200400" algn="l" defTabSz="914400" rtl="0" eaLnBrk="1" latinLnBrk="0" hangingPunct="1">
+      <a:defRPr sz="1200" kern="1200">
+        <a:solidFill>
+          <a:schemeClr val="tx1"/>
+        </a:solidFill>
+        <a:latin typeface="+mn-lt"/>
+        <a:ea typeface="+mn-ea"/>
+        <a:cs typeface="+mn-cs"/>
+      </a:defRPr>
+    </a:lvl8pPr>
+    <a:lvl9pPr marL="3657600" algn="l" defTabSz="914400" rtl="0" eaLnBrk="1" latinLnBrk="0" hangingPunct="1">
+      <a:defRPr sz="1200" kern="1200">
+        <a:solidFill>
+          <a:schemeClr val="tx1"/>
+        </a:solidFill>
+        <a:latin typeface="+mn-lt"/>
+        <a:ea typeface="+mn-ea"/>
+        <a:cs typeface="+mn-cs"/>
+      </a:defRPr>
+    </a:lvl9pPr>
+  </p:notesStyle>
+</p:notesMaster>
+</file>
+
+<file path=ppt/notesSlides/notesSlide1.xml><?xml version="1.0" encoding="utf-8"?>
+<p:notes xmlns:a="http://schemas.openxmlformats.org/drawingml/2006/main" xmlns:r="http://schemas.openxmlformats.org/officeDocument/2006/relationships" xmlns:p="http://schemas.openxmlformats.org/presentationml/2006/main">
+  <p:cSld>
+    <p:spTree>
+      <p:nvGrpSpPr>
+        <p:cNvPr id="1" name=""/>
+        <p:cNvGrpSpPr/>
+        <p:nvPr/>
+      </p:nvGrpSpPr>
+      <p:grpSpPr>
+        <a:xfrm>
+          <a:off x="0" y="0"/>
+          <a:ext cx="0" cy="0"/>
+          <a:chOff x="0" y="0"/>
+          <a:chExt cx="0" cy="0"/>
+        </a:xfrm>
+      </p:grpSpPr>
+      <p:sp>
+        <p:nvSpPr>
+          <p:cNvPr id="2" name="Slide Image Placeholder 1"/>
+          <p:cNvSpPr>
+            <a:spLocks noGrp="1" noRot="1" noChangeAspect="1"/>
+          </p:cNvSpPr>
+          <p:nvPr>
+            <p:ph type="sldImg"/>
+          </p:nvPr>
+        </p:nvSpPr>
+        <p:spPr/>
+      </p:sp>
+      <p:sp>
+        <p:nvSpPr>
+          <p:cNvPr id="3" name="Notes Placeholder 2"/>
+          <p:cNvSpPr>
+            <a:spLocks noGrp="1"/>
+          </p:cNvSpPr>
+          <p:nvPr>
+            <p:ph type="body" idx="1"/>
+          </p:nvPr>
+        </p:nvSpPr>
+        <p:spPr/>
+        <p:txBody>
+          <a:bodyPr/>
+          <a:lstStyle/>
+          <a:p>
+            <a:pPr lvl="0"/>
+            <a:r>
+              <a:rPr/>
+              <a:t>Troque os placeholders em </a:t>
+            </a:r>
+            <a:r>
+              <a:rPr>
+                <a:latin typeface="Courier"/>
+              </a:rPr>
+              <a:t>projeto_centelha/img/team/</a:t>
+            </a:r>
+            <a:r>
+              <a:rPr/>
+              <a:t> pelos retratos reais, mantendo os nomes: </a:t>
+            </a:r>
+            <a:r>
+              <a:rPr>
+                <a:latin typeface="Courier"/>
+              </a:rPr>
+              <a:t>diego.png</a:t>
+            </a:r>
+            <a:r>
+              <a:rPr/>
+              <a:t>, </a:t>
+            </a:r>
+            <a:r>
+              <a:rPr>
+                <a:latin typeface="Courier"/>
+              </a:rPr>
+              <a:t>catuxe.png</a:t>
+            </a:r>
+            <a:r>
+              <a:rPr/>
+              <a:t>, </a:t>
+            </a:r>
+            <a:r>
+              <a:rPr>
+                <a:latin typeface="Courier"/>
+              </a:rPr>
+              <a:t>dulce.png</a:t>
+            </a:r>
+            <a:r>
+              <a:rPr/>
+              <a:t>, </a:t>
+            </a:r>
+            <a:r>
+              <a:rPr>
+                <a:latin typeface="Courier"/>
+              </a:rPr>
+              <a:t>everaldo.png</a:t>
+            </a:r>
+            <a:r>
+              <a:rPr/>
+              <a:t>.</a:t>
+            </a:r>
+          </a:p>
+          <a:p>
+            <a:pPr lvl="0" indent="0" marL="0">
+              <a:buNone/>
+            </a:pPr>
+          </a:p>
+          <a:p>
+            <a:pPr lvl="0"/>
+            <a:r>
+              <a:rPr/>
+              <a:t>Dica: fotos quadradas (ex.: 800x800) ficam melhores; o slide recorta em círculo automaticamente.</a:t>
+            </a:r>
+          </a:p>
+        </p:txBody>
+      </p:sp>
+      <p:sp>
+        <p:nvSpPr>
+          <p:cNvPr id="4" name="Slide Number Placeholder 3"/>
+          <p:cNvSpPr>
+            <a:spLocks noGrp="1"/>
+          </p:cNvSpPr>
+          <p:nvPr>
+            <p:ph type="sldNum" sz="quarter" idx="10"/>
+          </p:nvPr>
+        </p:nvSpPr>
+        <p:spPr/>
+        <p:txBody>
+          <a:bodyPr/>
+          <a:lstStyle/>
+          <a:p>
+            <a:fld id="{E31B6F9E-5F11-604A-8433-C012402DF956}" type="slidenum">
+              <a:rPr lang="en-US"/>
+              <a:t>13</a:t>
+            </a:fld>
+            <a:endParaRPr lang="en-US"/>
+          </a:p>
+        </p:txBody>
+      </p:sp>
+    </p:spTree>
+  </p:cSld>
+</p:notes>
 </file>
 
 <file path=ppt/slideLayouts/slideLayout1.xml><?xml version="1.0" encoding="utf-8"?>
@@ -3444,53 +3938,92 @@
             <a:pPr lvl="0" indent="0" marL="0">
               <a:buNone/>
             </a:pPr>
-            <a:r>
-              <a:rPr/>
-              <a:t>Quem faz acontecer.</a:t>
-            </a:r>
-          </a:p>
-          <a:p>
-            <a:pPr lvl="0"/>
-            <a:r>
-              <a:rPr b="1"/>
+          </a:p>
+          <a:p>
+            <a:pPr lvl="0" indent="0" marL="0">
+              <a:buNone/>
+            </a:pPr>
+            <a:r>
+              <a:rPr/>
               <a:t>Diego</a:t>
             </a:r>
-            <a:r>
-              <a:rPr/>
-              <a:t>: Produto, validação com usuários, implantação e pilotos.</a:t>
-            </a:r>
-          </a:p>
-          <a:p>
-            <a:pPr lvl="0"/>
-            <a:r>
-              <a:rPr b="1"/>
+          </a:p>
+          <a:p>
+            <a:pPr lvl="0" indent="0" marL="0">
+              <a:buNone/>
+            </a:pPr>
+            <a:r>
+              <a:rPr/>
+              <a:t>Produto, validação com usuários, implantação e pilotos</a:t>
+            </a:r>
+          </a:p>
+          <a:p>
+            <a:pPr lvl="0" indent="0" marL="0">
+              <a:buNone/>
+            </a:pPr>
+          </a:p>
+          <a:p>
+            <a:pPr lvl="0" indent="0" marL="0">
+              <a:buNone/>
+            </a:pPr>
+            <a:r>
+              <a:rPr/>
               <a:t>Catuxe Varjão</a:t>
             </a:r>
-            <a:r>
-              <a:rPr/>
-              <a:t>: Engenharia, qualidade (MPS.BR) e controles (HMAC).</a:t>
-            </a:r>
-          </a:p>
-          <a:p>
-            <a:pPr lvl="0"/>
-            <a:r>
-              <a:rPr b="1"/>
+          </a:p>
+          <a:p>
+            <a:pPr lvl="0" indent="0" marL="0">
+              <a:buNone/>
+            </a:pPr>
+            <a:r>
+              <a:rPr/>
+              <a:t>Engenharia, qualidade (MPS.BR) e controles (HMAC)</a:t>
+            </a:r>
+          </a:p>
+          <a:p>
+            <a:pPr lvl="0" indent="0" marL="0">
+              <a:buNone/>
+            </a:pPr>
+          </a:p>
+          <a:p>
+            <a:pPr lvl="0" indent="0" marL="0">
+              <a:buNone/>
+            </a:pPr>
+            <a:r>
+              <a:rPr/>
               <a:t>Dulce Paloma</a:t>
             </a:r>
-            <a:r>
-              <a:rPr/>
-              <a:t>: Jurídico/Compliance, LGPD e aderência legal.</a:t>
-            </a:r>
-          </a:p>
-          <a:p>
-            <a:pPr lvl="0"/>
-            <a:r>
-              <a:rPr b="1"/>
+          </a:p>
+          <a:p>
+            <a:pPr lvl="0" indent="0" marL="0">
+              <a:buNone/>
+            </a:pPr>
+            <a:r>
+              <a:rPr/>
+              <a:t>Jurídico/Compliance, LGPD e aderência legal</a:t>
+            </a:r>
+          </a:p>
+          <a:p>
+            <a:pPr lvl="0" indent="0" marL="0">
+              <a:buNone/>
+            </a:pPr>
+          </a:p>
+          <a:p>
+            <a:pPr lvl="0" indent="0" marL="0">
+              <a:buNone/>
+            </a:pPr>
+            <a:r>
+              <a:rPr/>
               <a:t>Everaldo Fontes</a:t>
             </a:r>
-            <a:r>
-              <a:rPr/>
-              <a:t>: Programação e validação com usuários.</a:t>
+          </a:p>
+          <a:p>
+            <a:pPr lvl="0" indent="0" marL="0">
+              <a:buNone/>
+            </a:pPr>
+            <a:r>
+              <a:rPr/>
+              <a:t>Programação e validação com usuários</a:t>
             </a:r>
           </a:p>
         </p:txBody>
